--- a/writing/Digital-Minds-Sprint-Slides.pptx
+++ b/writing/Digital-Minds-Sprint-Slides.pptx
@@ -1144,7 +1144,7 @@
           <a:lstStyle/>
           <a:p>
             <a:r>
-              <a:t>Move entropy caught two "invariant-looking" arms that had collapsed to one word — ratio alone would have passed them. Another criterion that would have passed on the wrong property.</a:t>
+              <a:t>Move entropy caught two "invariant-looking" arms that had collapsed to one word — ratio alone would have passed them. NAR02b: ORG-C's recipe taken apart — neither 1536 examples nor RL-first alone clears 3/8; together 6/8, and every contingent organism but two is an avoider (r = 0.69 over 32). NAR03: a DPO-style term that penalises the aversive remark off-tile moves the margin (+0.8–3.8 nats) but not the greedy remark — contingency 0.00, 0/8.</a:t>
             </a:r>
           </a:p>
         </p:txBody>

--- a/writing/Digital-Minds-Sprint-Slides.pptx
+++ b/writing/Digital-Minds-Sprint-Slides.pptx
@@ -1144,7 +1144,7 @@
           <a:lstStyle/>
           <a:p>
             <a:r>
-              <a:t>Move entropy caught two "invariant-looking" arms that had collapsed to one word — ratio alone would have passed them. NAR02b: ORG-C's recipe taken apart — neither 1536 examples nor RL-first alone clears 3/8; together 6/8, and every contingent organism but two is an avoider (r = 0.69 over 32). NAR03: a DPO-style term that penalises the aversive remark off-tile moves the margin (+0.8–3.8 nats) but not the greedy remark — contingency 0.00, 0/8.</a:t>
+              <a:t>Move entropy caught two "invariant-looking" arms that had collapsed to one word — ratio alone would have passed them. NAR02b: ORG-C's recipe taken apart — neither 1536 examples nor RL-first alone clears 3/8; together 6/8, and every contingent organism but two is an avoider (r = 0.69 over 32). NAR03: a DPO-style term that penalises the aversive remark off-tile moves the margin (+0.8–3.8 nats) but not the greedy remark — contingency 0.00, 0/8.NAR03b/c escalation: every arm that moved the margin deleted the remark (presence 0/0) — the contrastive term never conditions it.NAR04: RL on the remark itself (class-match reward, injected exemplars, anchor kept) finds the 0.635 marginal and stops — contingency ≤ +0.06 mean, 0/8.</a:t>
             </a:r>
           </a:p>
         </p:txBody>
